--- a/docs/答辩演示-SiteLens.pptx
+++ b/docs/答辩演示-SiteLens.pptx
@@ -161,7 +161,7 @@
     </p:spTree>
     <p:extLst>
       <p:ext uri="{BB962C8B-B14F-4D97-AF65-F5344CB8AC3E}">
-        <p14:creationId xmlns:p14="http://schemas.microsoft.com/office/powerpoint/2010/main" val="4217967984"/>
+        <p14:creationId xmlns:p14="http://schemas.microsoft.com/office/powerpoint/2010/main" val="561436123"/>
       </p:ext>
     </p:extLst>
   </p:cSld>
@@ -10284,8 +10284,8 @@
         </p:nvSpPr>
         <p:spPr>
           <a:xfrm>
-            <a:off x="1888236" y="1874520"/>
-            <a:ext cx="8412480" cy="5504462"/>
+            <a:off x="2025396" y="1874520"/>
+            <a:ext cx="8138160" cy="4441601"/>
           </a:xfrm>
           <a:prstGeom prst="rect">
             <a:avLst/>
@@ -10324,8 +10324,8 @@
         </p:blipFill>
         <p:spPr>
           <a:xfrm>
-            <a:off x="1888236" y="1874520"/>
-            <a:ext cx="8412480" cy="5504462"/>
+            <a:off x="2025396" y="1874520"/>
+            <a:ext cx="8138160" cy="4441601"/>
           </a:xfrm>
           <a:prstGeom prst="rect">
             <a:avLst/>
@@ -10340,7 +10340,7 @@
         </p:nvSpPr>
         <p:spPr>
           <a:xfrm>
-            <a:off x="502920" y="5852160"/>
+            <a:off x="502920" y="6389273"/>
             <a:ext cx="11183112" cy="365760"/>
           </a:xfrm>
           <a:prstGeom prst="rect">
@@ -10357,7 +10357,7 @@
               <a:buNone/>
             </a:pPr>
             <a:r>
-              <a:rPr lang="en-US" sz="1400" dirty="0">
+              <a:rPr lang="en-US" sz="1350" dirty="0">
                 <a:solidFill>
                   <a:srgbClr val="64748B"/>
                 </a:solidFill>
@@ -10367,7 +10367,7 @@
               </a:rPr>
               <a:t>识别出什么产品，就路由什么专项模板——不做无意义空跑，模板库长期轮转全覆盖</a:t>
             </a:r>
-            <a:endParaRPr lang="en-US" sz="1400" dirty="0"/>
+            <a:endParaRPr lang="en-US" sz="1350" dirty="0"/>
           </a:p>
         </p:txBody>
       </p:sp>
@@ -14865,11 +14865,11 @@
         <p:spPr>
           <a:xfrm>
             <a:off x="502920" y="1783080"/>
-            <a:ext cx="5486400" cy="4206240"/>
+            <a:ext cx="5486400" cy="3246120"/>
           </a:xfrm>
           <a:prstGeom prst="roundRect">
             <a:avLst>
-              <a:gd name="adj" fmla="val 1304"/>
+              <a:gd name="adj" fmla="val 1690"/>
             </a:avLst>
           </a:prstGeom>
           <a:solidFill>
@@ -15105,11 +15105,11 @@
         <p:spPr>
           <a:xfrm>
             <a:off x="6400800" y="1783080"/>
-            <a:ext cx="5257800" cy="4206240"/>
+            <a:ext cx="5257800" cy="3246120"/>
           </a:xfrm>
           <a:prstGeom prst="roundRect">
             <a:avLst>
-              <a:gd name="adj" fmla="val 1304"/>
+              <a:gd name="adj" fmla="val 1690"/>
             </a:avLst>
           </a:prstGeom>
           <a:solidFill>
@@ -15952,11 +15952,11 @@
         <p:spPr>
           <a:xfrm>
             <a:off x="502920" y="1783080"/>
-            <a:ext cx="5486400" cy="4206240"/>
+            <a:ext cx="5486400" cy="3566160"/>
           </a:xfrm>
           <a:prstGeom prst="roundRect">
             <a:avLst>
-              <a:gd name="adj" fmla="val 1304"/>
+              <a:gd name="adj" fmla="val 1538"/>
             </a:avLst>
           </a:prstGeom>
           <a:solidFill>
@@ -16135,7 +16135,55 @@
                 <a:ea typeface="微软雅黑" pitchFamily="34" charset="-122"/>
                 <a:cs typeface="微软雅黑" pitchFamily="34" charset="-120"/>
               </a:rPr>
+              <a:t>验证码字段自动检测（captcha / verif / code）</a:t>
+            </a:r>
+            <a:endParaRPr lang="en-US" sz="1250" dirty="0"/>
+          </a:p>
+          <a:p>
+            <a:pPr marL="152400" indent="-152400">
+              <a:lnSpc>
+                <a:spcPts val="1900"/>
+              </a:lnSpc>
+              <a:spcAft>
+                <a:spcPts val="1200"/>
+              </a:spcAft>
+              <a:buSzPct val="100000"/>
+              <a:buChar char="▸"/>
+            </a:pPr>
+            <a:r>
+              <a:rPr lang="en-US" sz="1250" dirty="0">
+                <a:solidFill>
+                  <a:srgbClr val="1A1A1A"/>
+                </a:solidFill>
+                <a:latin typeface="微软雅黑" pitchFamily="34" charset="0"/>
+                <a:ea typeface="微软雅黑" pitchFamily="34" charset="-122"/>
+                <a:cs typeface="微软雅黑" pitchFamily="34" charset="-120"/>
+              </a:rPr>
               <a:t>总请求数硬性封顶 300 次</a:t>
+            </a:r>
+            <a:endParaRPr lang="en-US" sz="1250" dirty="0"/>
+          </a:p>
+          <a:p>
+            <a:pPr marL="152400" indent="-152400">
+              <a:lnSpc>
+                <a:spcPts val="1900"/>
+              </a:lnSpc>
+              <a:spcAft>
+                <a:spcPts val="1200"/>
+              </a:spcAft>
+              <a:buSzPct val="100000"/>
+              <a:buChar char="▸"/>
+            </a:pPr>
+            <a:r>
+              <a:rPr lang="en-US" sz="1250" dirty="0">
+                <a:solidFill>
+                  <a:srgbClr val="1A1A1A"/>
+                </a:solidFill>
+                <a:latin typeface="微软雅黑" pitchFamily="34" charset="0"/>
+                <a:ea typeface="微软雅黑" pitchFamily="34" charset="-122"/>
+                <a:cs typeface="微软雅黑" pitchFamily="34" charset="-120"/>
+              </a:rPr>
+              <a:t>OCR 本地推理，全程不联网</a:t>
             </a:r>
             <a:endParaRPr lang="en-US" sz="1250" dirty="0"/>
           </a:p>
@@ -16150,11 +16198,11 @@
         <p:spPr>
           <a:xfrm>
             <a:off x="6400800" y="1783080"/>
-            <a:ext cx="5257800" cy="4206240"/>
+            <a:ext cx="5257800" cy="3246120"/>
           </a:xfrm>
           <a:prstGeom prst="roundRect">
             <a:avLst>
-              <a:gd name="adj" fmla="val 1304"/>
+              <a:gd name="adj" fmla="val 1690"/>
             </a:avLst>
           </a:prstGeom>
           <a:solidFill>
@@ -30273,6 +30321,54 @@
             </a:r>
             <a:endParaRPr lang="en-US" sz="1300" dirty="0"/>
           </a:p>
+          <a:p>
+            <a:pPr marL="152400" indent="-152400">
+              <a:lnSpc>
+                <a:spcPts val="1900"/>
+              </a:lnSpc>
+              <a:spcAft>
+                <a:spcPts val="1300"/>
+              </a:spcAft>
+              <a:buSzPct val="100000"/>
+              <a:buChar char="▸"/>
+            </a:pPr>
+            <a:r>
+              <a:rPr lang="en-US" sz="1300" dirty="0">
+                <a:solidFill>
+                  <a:srgbClr val="1A1A1A"/>
+                </a:solidFill>
+                <a:latin typeface="微软雅黑" pitchFamily="34" charset="0"/>
+                <a:ea typeface="微软雅黑" pitchFamily="34" charset="-122"/>
+                <a:cs typeface="微软雅黑" pitchFamily="34" charset="-120"/>
+              </a:rPr>
+              <a:t>材料齐备：46 页报告 / 25 页答辩 PPT / 全套测试证据</a:t>
+            </a:r>
+            <a:endParaRPr lang="en-US" sz="1300" dirty="0"/>
+          </a:p>
+          <a:p>
+            <a:pPr marL="152400" indent="-152400">
+              <a:lnSpc>
+                <a:spcPts val="1900"/>
+              </a:lnSpc>
+              <a:spcAft>
+                <a:spcPts val="1300"/>
+              </a:spcAft>
+              <a:buSzPct val="100000"/>
+              <a:buChar char="▸"/>
+            </a:pPr>
+            <a:r>
+              <a:rPr lang="en-US" sz="1300" dirty="0">
+                <a:solidFill>
+                  <a:srgbClr val="1A1A1A"/>
+                </a:solidFill>
+                <a:latin typeface="微软雅黑" pitchFamily="34" charset="0"/>
+                <a:ea typeface="微软雅黑" pitchFamily="34" charset="-122"/>
+                <a:cs typeface="微软雅黑" pitchFamily="34" charset="-120"/>
+              </a:rPr>
+              <a:t>开源来源全部署名，合规可查</a:t>
+            </a:r>
+            <a:endParaRPr lang="en-US" sz="1300" dirty="0"/>
+          </a:p>
         </p:txBody>
       </p:sp>
       <p:sp>
@@ -36728,7 +36824,7 @@
         <p:spPr>
           <a:xfrm>
             <a:off x="4892040" y="1874520"/>
-            <a:ext cx="6766560" cy="1810512"/>
+            <a:ext cx="6766560" cy="1920240"/>
           </a:xfrm>
           <a:prstGeom prst="rect">
             <a:avLst/>
@@ -36808,129 +36904,15 @@
           </a:p>
         </p:txBody>
       </p:sp>
-      <p:pic>
-        <p:nvPicPr>
-          <p:cNvPr id="13" name="Image 2" descr="D:/fengqiao/Desktop/26-08python实训/实训考核2/docs/build/img/detail_badges.png"/>
-          <p:cNvPicPr>
-            <a:picLocks noChangeAspect="1"/>
-          </p:cNvPicPr>
+      <p:sp>
+        <p:nvSpPr>
+          <p:cNvPr id="13" name="Text 9"/>
+          <p:cNvSpPr/>
           <p:nvPr/>
-        </p:nvPicPr>
-        <p:blipFill>
-          <a:blip r:embed="rId6"/>
-          <a:srcRect/>
-          <a:stretch/>
-        </p:blipFill>
+        </p:nvSpPr>
         <p:spPr>
           <a:xfrm>
-            <a:off x="4892040" y="4206240"/>
-            <a:ext cx="3154680" cy="2084832"/>
-          </a:xfrm>
-          <a:prstGeom prst="rect">
-            <a:avLst/>
-          </a:prstGeom>
-        </p:spPr>
-      </p:pic>
-      <p:sp>
-        <p:nvSpPr>
-          <p:cNvPr id="14" name="Shape 9"/>
-          <p:cNvSpPr/>
-          <p:nvPr/>
-        </p:nvSpPr>
-        <p:spPr>
-          <a:xfrm>
-            <a:off x="4892040" y="4206240"/>
-            <a:ext cx="3154680" cy="2084832"/>
-          </a:xfrm>
-          <a:prstGeom prst="rect">
-            <a:avLst/>
-          </a:prstGeom>
-          <a:solidFill>
-            <a:srgbClr val="000000">
-              <a:alpha val="0"/>
-            </a:srgbClr>
-          </a:solidFill>
-          <a:ln w="12700">
-            <a:solidFill>
-              <a:srgbClr val="E2E8F0"/>
-            </a:solidFill>
-            <a:prstDash val="solid"/>
-          </a:ln>
-        </p:spPr>
-        <p:txBody>
-          <a:bodyPr/>
-          <a:lstStyle/>
-          <a:p>
-            <a:endParaRPr lang="zh-CN" altLang="en-US"/>
-          </a:p>
-        </p:txBody>
-      </p:sp>
-      <p:pic>
-        <p:nvPicPr>
-          <p:cNvPr id="15" name="Image 3" descr="D:/fengqiao/Desktop/26-08python实训/实训考核2/docs/build/img/detail_intel.png"/>
-          <p:cNvPicPr>
-            <a:picLocks noChangeAspect="1"/>
-          </p:cNvPicPr>
-          <p:nvPr/>
-        </p:nvPicPr>
-        <p:blipFill>
-          <a:blip r:embed="rId5"/>
-          <a:srcRect/>
-          <a:stretch/>
-        </p:blipFill>
-        <p:spPr>
-          <a:xfrm>
-            <a:off x="8275320" y="4206240"/>
-            <a:ext cx="3383280" cy="2084832"/>
-          </a:xfrm>
-          <a:prstGeom prst="rect">
-            <a:avLst/>
-          </a:prstGeom>
-        </p:spPr>
-      </p:pic>
-      <p:sp>
-        <p:nvSpPr>
-          <p:cNvPr id="16" name="Shape 10"/>
-          <p:cNvSpPr/>
-          <p:nvPr/>
-        </p:nvSpPr>
-        <p:spPr>
-          <a:xfrm>
-            <a:off x="8275320" y="4206240"/>
-            <a:ext cx="3383280" cy="2084832"/>
-          </a:xfrm>
-          <a:prstGeom prst="rect">
-            <a:avLst/>
-          </a:prstGeom>
-          <a:solidFill>
-            <a:srgbClr val="000000">
-              <a:alpha val="0"/>
-            </a:srgbClr>
-          </a:solidFill>
-          <a:ln w="12700">
-            <a:solidFill>
-              <a:srgbClr val="E2E8F0"/>
-            </a:solidFill>
-            <a:prstDash val="solid"/>
-          </a:ln>
-        </p:spPr>
-        <p:txBody>
-          <a:bodyPr/>
-          <a:lstStyle/>
-          <a:p>
-            <a:endParaRPr lang="zh-CN" altLang="en-US"/>
-          </a:p>
-        </p:txBody>
-      </p:sp>
-      <p:sp>
-        <p:nvSpPr>
-          <p:cNvPr id="17" name="Text 11"/>
-          <p:cNvSpPr/>
-          <p:nvPr/>
-        </p:nvSpPr>
-        <p:spPr>
-          <a:xfrm>
-            <a:off x="502920" y="6355080"/>
+            <a:off x="502920" y="4251960"/>
             <a:ext cx="11183112" cy="457200"/>
           </a:xfrm>
           <a:prstGeom prst="rect">
@@ -37053,7 +37035,7 @@
                               <p:par>
                                 <p:cTn id="8" presetID="10" presetClass="entr" presetSubtype="0" fill="hold" grpId="0" nodeType="withEffect">
                                   <p:stCondLst>
-                                    <p:cond delay="80"/>
+                                    <p:cond delay="120"/>
                                   </p:stCondLst>
                                   <p:childTnLst>
                                     <p:set>
@@ -37088,7 +37070,7 @@
                               <p:par>
                                 <p:cTn id="11" presetID="10" presetClass="entr" presetSubtype="0" fill="hold" grpId="0" nodeType="withEffect">
                                   <p:stCondLst>
-                                    <p:cond delay="160"/>
+                                    <p:cond delay="240"/>
                                   </p:stCondLst>
                                   <p:childTnLst>
                                     <p:set>
@@ -37123,7 +37105,7 @@
                               <p:par>
                                 <p:cTn id="14" presetID="10" presetClass="entr" presetSubtype="0" fill="hold" grpId="0" nodeType="withEffect">
                                   <p:stCondLst>
-                                    <p:cond delay="240"/>
+                                    <p:cond delay="360"/>
                                   </p:stCondLst>
                                   <p:childTnLst>
                                     <p:set>
@@ -37158,7 +37140,7 @@
                               <p:par>
                                 <p:cTn id="17" presetID="10" presetClass="entr" presetSubtype="0" fill="hold" grpId="0" nodeType="withEffect">
                                   <p:stCondLst>
-                                    <p:cond delay="320"/>
+                                    <p:cond delay="480"/>
                                   </p:stCondLst>
                                   <p:childTnLst>
                                     <p:set>
@@ -37193,7 +37175,7 @@
                               <p:par>
                                 <p:cTn id="20" presetID="10" presetClass="entr" presetSubtype="0" fill="hold" nodeType="withEffect">
                                   <p:stCondLst>
-                                    <p:cond delay="400"/>
+                                    <p:cond delay="600"/>
                                   </p:stCondLst>
                                   <p:childTnLst>
                                     <p:set>
@@ -37228,7 +37210,7 @@
                               <p:par>
                                 <p:cTn id="23" presetID="10" presetClass="entr" presetSubtype="0" fill="hold" grpId="0" nodeType="withEffect">
                                   <p:stCondLst>
-                                    <p:cond delay="480"/>
+                                    <p:cond delay="720"/>
                                   </p:stCondLst>
                                   <p:childTnLst>
                                     <p:set>
@@ -37263,7 +37245,7 @@
                               <p:par>
                                 <p:cTn id="26" presetID="10" presetClass="entr" presetSubtype="0" fill="hold" grpId="0" nodeType="withEffect">
                                   <p:stCondLst>
-                                    <p:cond delay="560"/>
+                                    <p:cond delay="840"/>
                                   </p:stCondLst>
                                   <p:childTnLst>
                                     <p:set>
@@ -37298,7 +37280,7 @@
                               <p:par>
                                 <p:cTn id="29" presetID="10" presetClass="entr" presetSubtype="0" fill="hold" nodeType="withEffect">
                                   <p:stCondLst>
-                                    <p:cond delay="640"/>
+                                    <p:cond delay="960"/>
                                   </p:stCondLst>
                                   <p:childTnLst>
                                     <p:set>
@@ -37333,7 +37315,7 @@
                               <p:par>
                                 <p:cTn id="32" presetID="10" presetClass="entr" presetSubtype="0" fill="hold" grpId="0" nodeType="withEffect">
                                   <p:stCondLst>
-                                    <p:cond delay="720"/>
+                                    <p:cond delay="1080"/>
                                   </p:stCondLst>
                                   <p:childTnLst>
                                     <p:set>
@@ -37368,7 +37350,7 @@
                               <p:par>
                                 <p:cTn id="35" presetID="10" presetClass="entr" presetSubtype="0" fill="hold" grpId="0" nodeType="withEffect">
                                   <p:stCondLst>
-                                    <p:cond delay="800"/>
+                                    <p:cond delay="1100"/>
                                   </p:stCondLst>
                                   <p:childTnLst>
                                     <p:set>
@@ -37401,9 +37383,9 @@
                                 </p:cTn>
                               </p:par>
                               <p:par>
-                                <p:cTn id="38" presetID="10" presetClass="entr" presetSubtype="0" fill="hold" nodeType="withEffect">
+                                <p:cTn id="38" presetID="10" presetClass="entr" presetSubtype="0" fill="hold" grpId="0" nodeType="withEffect">
                                   <p:stCondLst>
-                                    <p:cond delay="880"/>
+                                    <p:cond delay="1100"/>
                                   </p:stCondLst>
                                   <p:childTnLst>
                                     <p:set>
@@ -37429,146 +37411,6 @@
                                         <p:cTn id="40" dur="400"/>
                                         <p:tgtEl>
                                           <p:spTgt spid="13"/>
-                                        </p:tgtEl>
-                                      </p:cBhvr>
-                                    </p:animEffect>
-                                  </p:childTnLst>
-                                </p:cTn>
-                              </p:par>
-                              <p:par>
-                                <p:cTn id="41" presetID="10" presetClass="entr" presetSubtype="0" fill="hold" grpId="0" nodeType="withEffect">
-                                  <p:stCondLst>
-                                    <p:cond delay="960"/>
-                                  </p:stCondLst>
-                                  <p:childTnLst>
-                                    <p:set>
-                                      <p:cBhvr>
-                                        <p:cTn id="42" dur="1" fill="hold">
-                                          <p:stCondLst>
-                                            <p:cond delay="0"/>
-                                          </p:stCondLst>
-                                        </p:cTn>
-                                        <p:tgtEl>
-                                          <p:spTgt spid="14"/>
-                                        </p:tgtEl>
-                                        <p:attrNameLst>
-                                          <p:attrName>style.visibility</p:attrName>
-                                        </p:attrNameLst>
-                                      </p:cBhvr>
-                                      <p:to>
-                                        <p:strVal val="visible"/>
-                                      </p:to>
-                                    </p:set>
-                                    <p:animEffect transition="in" filter="fade">
-                                      <p:cBhvr>
-                                        <p:cTn id="43" dur="400"/>
-                                        <p:tgtEl>
-                                          <p:spTgt spid="14"/>
-                                        </p:tgtEl>
-                                      </p:cBhvr>
-                                    </p:animEffect>
-                                  </p:childTnLst>
-                                </p:cTn>
-                              </p:par>
-                              <p:par>
-                                <p:cTn id="44" presetID="10" presetClass="entr" presetSubtype="0" fill="hold" nodeType="withEffect">
-                                  <p:stCondLst>
-                                    <p:cond delay="1040"/>
-                                  </p:stCondLst>
-                                  <p:childTnLst>
-                                    <p:set>
-                                      <p:cBhvr>
-                                        <p:cTn id="45" dur="1" fill="hold">
-                                          <p:stCondLst>
-                                            <p:cond delay="0"/>
-                                          </p:stCondLst>
-                                        </p:cTn>
-                                        <p:tgtEl>
-                                          <p:spTgt spid="15"/>
-                                        </p:tgtEl>
-                                        <p:attrNameLst>
-                                          <p:attrName>style.visibility</p:attrName>
-                                        </p:attrNameLst>
-                                      </p:cBhvr>
-                                      <p:to>
-                                        <p:strVal val="visible"/>
-                                      </p:to>
-                                    </p:set>
-                                    <p:animEffect transition="in" filter="fade">
-                                      <p:cBhvr>
-                                        <p:cTn id="46" dur="400"/>
-                                        <p:tgtEl>
-                                          <p:spTgt spid="15"/>
-                                        </p:tgtEl>
-                                      </p:cBhvr>
-                                    </p:animEffect>
-                                  </p:childTnLst>
-                                </p:cTn>
-                              </p:par>
-                              <p:par>
-                                <p:cTn id="47" presetID="10" presetClass="entr" presetSubtype="0" fill="hold" grpId="0" nodeType="withEffect">
-                                  <p:stCondLst>
-                                    <p:cond delay="1100"/>
-                                  </p:stCondLst>
-                                  <p:childTnLst>
-                                    <p:set>
-                                      <p:cBhvr>
-                                        <p:cTn id="48" dur="1" fill="hold">
-                                          <p:stCondLst>
-                                            <p:cond delay="0"/>
-                                          </p:stCondLst>
-                                        </p:cTn>
-                                        <p:tgtEl>
-                                          <p:spTgt spid="16"/>
-                                        </p:tgtEl>
-                                        <p:attrNameLst>
-                                          <p:attrName>style.visibility</p:attrName>
-                                        </p:attrNameLst>
-                                      </p:cBhvr>
-                                      <p:to>
-                                        <p:strVal val="visible"/>
-                                      </p:to>
-                                    </p:set>
-                                    <p:animEffect transition="in" filter="fade">
-                                      <p:cBhvr>
-                                        <p:cTn id="49" dur="400"/>
-                                        <p:tgtEl>
-                                          <p:spTgt spid="16"/>
-                                        </p:tgtEl>
-                                      </p:cBhvr>
-                                    </p:animEffect>
-                                  </p:childTnLst>
-                                </p:cTn>
-                              </p:par>
-                              <p:par>
-                                <p:cTn id="50" presetID="10" presetClass="entr" presetSubtype="0" fill="hold" grpId="0" nodeType="withEffect">
-                                  <p:stCondLst>
-                                    <p:cond delay="1100"/>
-                                  </p:stCondLst>
-                                  <p:childTnLst>
-                                    <p:set>
-                                      <p:cBhvr>
-                                        <p:cTn id="51" dur="1" fill="hold">
-                                          <p:stCondLst>
-                                            <p:cond delay="0"/>
-                                          </p:stCondLst>
-                                        </p:cTn>
-                                        <p:tgtEl>
-                                          <p:spTgt spid="17"/>
-                                        </p:tgtEl>
-                                        <p:attrNameLst>
-                                          <p:attrName>style.visibility</p:attrName>
-                                        </p:attrNameLst>
-                                      </p:cBhvr>
-                                      <p:to>
-                                        <p:strVal val="visible"/>
-                                      </p:to>
-                                    </p:set>
-                                    <p:animEffect transition="in" filter="fade">
-                                      <p:cBhvr>
-                                        <p:cTn id="52" dur="400"/>
-                                        <p:tgtEl>
-                                          <p:spTgt spid="17"/>
                                         </p:tgtEl>
                                       </p:cBhvr>
                                     </p:animEffect>
@@ -37612,9 +37454,7 @@
       <p:bldP spid="9" grpId="0" animBg="1"/>
       <p:bldP spid="11" grpId="0" animBg="1"/>
       <p:bldP spid="12" grpId="0" animBg="1"/>
-      <p:bldP spid="14" grpId="0" animBg="1"/>
-      <p:bldP spid="16" grpId="0" animBg="1"/>
-      <p:bldP spid="17" grpId="0" animBg="1"/>
+      <p:bldP spid="13" grpId="0" animBg="1"/>
     </p:bldLst>
   </p:timing>
 </p:sld>
@@ -38390,8 +38230,8 @@
         </p:nvSpPr>
         <p:spPr>
           <a:xfrm>
-            <a:off x="7680960" y="1783080"/>
-            <a:ext cx="4023360" cy="3227832"/>
+            <a:off x="7680960" y="2148840"/>
+            <a:ext cx="4023360" cy="2112264"/>
           </a:xfrm>
           <a:prstGeom prst="rect">
             <a:avLst/>
@@ -38437,8 +38277,8 @@
         </p:blipFill>
         <p:spPr>
           <a:xfrm>
-            <a:off x="7735824" y="1837944"/>
-            <a:ext cx="3913632" cy="3118104"/>
+            <a:off x="7735824" y="2203704"/>
+            <a:ext cx="3913632" cy="2002536"/>
           </a:xfrm>
           <a:prstGeom prst="rect">
             <a:avLst/>
@@ -39582,7 +39422,7 @@
         <p:spPr>
           <a:xfrm>
             <a:off x="502920" y="1783080"/>
-            <a:ext cx="7818120" cy="6162518"/>
+            <a:ext cx="6537960" cy="5045511"/>
           </a:xfrm>
           <a:prstGeom prst="rect">
             <a:avLst/>
@@ -39622,7 +39462,7 @@
         <p:spPr>
           <a:xfrm>
             <a:off x="502920" y="1783080"/>
-            <a:ext cx="7818120" cy="6162518"/>
+            <a:ext cx="6537960" cy="5045511"/>
           </a:xfrm>
           <a:prstGeom prst="rect">
             <a:avLst/>
@@ -39637,8 +39477,8 @@
         </p:nvSpPr>
         <p:spPr>
           <a:xfrm>
-            <a:off x="8595360" y="1920240"/>
-            <a:ext cx="3017520" cy="365760"/>
+            <a:off x="7360920" y="1965960"/>
+            <a:ext cx="2743200" cy="365760"/>
           </a:xfrm>
           <a:prstGeom prst="rect">
             <a:avLst/>
@@ -39654,7 +39494,7 @@
               <a:buNone/>
             </a:pPr>
             <a:r>
-              <a:rPr lang="en-US" sz="1600" b="1" dirty="0">
+              <a:rPr lang="en-US" sz="1500" b="1" dirty="0">
                 <a:solidFill>
                   <a:srgbClr val="3B82F6"/>
                 </a:solidFill>
@@ -39664,7 +39504,7 @@
               </a:rPr>
               <a:t>封装</a:t>
             </a:r>
-            <a:endParaRPr lang="en-US" sz="1600" dirty="0"/>
+            <a:endParaRPr lang="en-US" sz="1500" dirty="0"/>
           </a:p>
         </p:txBody>
       </p:sp>
@@ -39676,8 +39516,8 @@
         </p:nvSpPr>
         <p:spPr>
           <a:xfrm>
-            <a:off x="8595360" y="2304288"/>
-            <a:ext cx="3017520" cy="868680"/>
+            <a:off x="7360920" y="2350008"/>
+            <a:ext cx="4114800" cy="868680"/>
           </a:xfrm>
           <a:prstGeom prst="rect">
             <a:avLst/>
@@ -39718,8 +39558,8 @@
         </p:nvSpPr>
         <p:spPr>
           <a:xfrm>
-            <a:off x="8595360" y="3337560"/>
-            <a:ext cx="3017520" cy="365760"/>
+            <a:off x="7360920" y="3383280"/>
+            <a:ext cx="2743200" cy="365760"/>
           </a:xfrm>
           <a:prstGeom prst="rect">
             <a:avLst/>
@@ -39735,7 +39575,7 @@
               <a:buNone/>
             </a:pPr>
             <a:r>
-              <a:rPr lang="en-US" sz="1600" b="1" dirty="0">
+              <a:rPr lang="en-US" sz="1500" b="1" dirty="0">
                 <a:solidFill>
                   <a:srgbClr val="3B82F6"/>
                 </a:solidFill>
@@ -39745,7 +39585,7 @@
               </a:rPr>
               <a:t>继承</a:t>
             </a:r>
-            <a:endParaRPr lang="en-US" sz="1600" dirty="0"/>
+            <a:endParaRPr lang="en-US" sz="1500" dirty="0"/>
           </a:p>
         </p:txBody>
       </p:sp>
@@ -39757,8 +39597,8 @@
         </p:nvSpPr>
         <p:spPr>
           <a:xfrm>
-            <a:off x="8595360" y="3721608"/>
-            <a:ext cx="3017520" cy="868680"/>
+            <a:off x="7360920" y="3767328"/>
+            <a:ext cx="4114800" cy="868680"/>
           </a:xfrm>
           <a:prstGeom prst="rect">
             <a:avLst/>
@@ -39799,8 +39639,8 @@
         </p:nvSpPr>
         <p:spPr>
           <a:xfrm>
-            <a:off x="8595360" y="4754880"/>
-            <a:ext cx="3017520" cy="365760"/>
+            <a:off x="7360920" y="4800600"/>
+            <a:ext cx="2743200" cy="365760"/>
           </a:xfrm>
           <a:prstGeom prst="rect">
             <a:avLst/>
@@ -39816,7 +39656,7 @@
               <a:buNone/>
             </a:pPr>
             <a:r>
-              <a:rPr lang="en-US" sz="1600" b="1" dirty="0">
+              <a:rPr lang="en-US" sz="1500" b="1" dirty="0">
                 <a:solidFill>
                   <a:srgbClr val="3B82F6"/>
                 </a:solidFill>
@@ -39826,7 +39666,7 @@
               </a:rPr>
               <a:t>多态 + 组合</a:t>
             </a:r>
-            <a:endParaRPr lang="en-US" sz="1600" dirty="0"/>
+            <a:endParaRPr lang="en-US" sz="1500" dirty="0"/>
           </a:p>
         </p:txBody>
       </p:sp>
@@ -39838,8 +39678,8 @@
         </p:nvSpPr>
         <p:spPr>
           <a:xfrm>
-            <a:off x="8595360" y="5138928"/>
-            <a:ext cx="3017520" cy="868680"/>
+            <a:off x="7360920" y="5184648"/>
+            <a:ext cx="4114800" cy="868680"/>
           </a:xfrm>
           <a:prstGeom prst="rect">
             <a:avLst/>

--- a/docs/答辩演示-SiteLens.pptx
+++ b/docs/答辩演示-SiteLens.pptx
@@ -161,7 +161,7 @@
     </p:spTree>
     <p:extLst>
       <p:ext uri="{BB962C8B-B14F-4D97-AF65-F5344CB8AC3E}">
-        <p14:creationId xmlns:p14="http://schemas.microsoft.com/office/powerpoint/2010/main" val="561436123"/>
+        <p14:creationId xmlns:p14="http://schemas.microsoft.com/office/powerpoint/2010/main" val="632582082"/>
       </p:ext>
     </p:extLst>
   </p:cSld>
@@ -3508,13 +3508,13 @@
   <p:clrMapOvr>
     <a:masterClrMapping/>
   </p:clrMapOvr>
-  <mc:AlternateContent xmlns:mc="http://schemas.openxmlformats.org/markup-compatibility/2006">
-    <mc:Choice xmlns:p14="http://schemas.microsoft.com/office/powerpoint/2010/main" Requires="p14">
+  <mc:AlternateContent xmlns:mc="http://schemas.openxmlformats.org/markup-compatibility/2006" xmlns:p14="http://schemas.microsoft.com/office/powerpoint/2010/main">
+    <mc:Choice Requires="p14">
       <p:transition spd="med" p14:dur="700">
         <p:fade thruBlk="1"/>
       </p:transition>
     </mc:Choice>
-    <mc:Fallback>
+    <mc:Fallback xmlns="">
       <p:transition spd="med">
         <p:fade thruBlk="1"/>
       </p:transition>
@@ -4734,13 +4734,13 @@
   <p:clrMapOvr>
     <a:masterClrMapping/>
   </p:clrMapOvr>
-  <mc:AlternateContent xmlns:mc="http://schemas.openxmlformats.org/markup-compatibility/2006">
-    <mc:Choice xmlns:p14="http://schemas.microsoft.com/office/powerpoint/2010/main" Requires="p14">
+  <mc:AlternateContent xmlns:mc="http://schemas.openxmlformats.org/markup-compatibility/2006" xmlns:p14="http://schemas.microsoft.com/office/powerpoint/2010/main">
+    <mc:Choice Requires="p14">
       <p:transition spd="med" p14:dur="700">
         <p:fade thruBlk="1"/>
       </p:transition>
     </mc:Choice>
-    <mc:Fallback>
+    <mc:Fallback xmlns="">
       <p:transition spd="med">
         <p:fade thruBlk="1"/>
       </p:transition>
@@ -6451,13 +6451,13 @@
   <p:clrMapOvr>
     <a:masterClrMapping/>
   </p:clrMapOvr>
-  <mc:AlternateContent xmlns:mc="http://schemas.openxmlformats.org/markup-compatibility/2006">
-    <mc:Choice xmlns:p14="http://schemas.microsoft.com/office/powerpoint/2010/main" Requires="p14">
+  <mc:AlternateContent xmlns:mc="http://schemas.openxmlformats.org/markup-compatibility/2006" xmlns:p14="http://schemas.microsoft.com/office/powerpoint/2010/main">
+    <mc:Choice Requires="p14">
       <p:transition spd="med" p14:dur="700">
         <p:fade thruBlk="1"/>
       </p:transition>
     </mc:Choice>
-    <mc:Fallback>
+    <mc:Fallback xmlns="">
       <p:transition spd="med">
         <p:fade thruBlk="1"/>
       </p:transition>
@@ -7996,13 +7996,13 @@
   <p:clrMapOvr>
     <a:masterClrMapping/>
   </p:clrMapOvr>
-  <mc:AlternateContent xmlns:mc="http://schemas.openxmlformats.org/markup-compatibility/2006">
-    <mc:Choice xmlns:p14="http://schemas.microsoft.com/office/powerpoint/2010/main" Requires="p14">
+  <mc:AlternateContent xmlns:mc="http://schemas.openxmlformats.org/markup-compatibility/2006" xmlns:p14="http://schemas.microsoft.com/office/powerpoint/2010/main">
+    <mc:Choice Requires="p14">
       <p:transition spd="med" p14:dur="700">
         <p:fade thruBlk="1"/>
       </p:transition>
     </mc:Choice>
-    <mc:Fallback>
+    <mc:Fallback xmlns="">
       <p:transition spd="med">
         <p:fade thruBlk="1"/>
       </p:transition>
@@ -9454,13 +9454,13 @@
   <p:clrMapOvr>
     <a:masterClrMapping/>
   </p:clrMapOvr>
-  <mc:AlternateContent xmlns:mc="http://schemas.openxmlformats.org/markup-compatibility/2006">
-    <mc:Choice xmlns:p14="http://schemas.microsoft.com/office/powerpoint/2010/main" Requires="p14">
+  <mc:AlternateContent xmlns:mc="http://schemas.openxmlformats.org/markup-compatibility/2006" xmlns:p14="http://schemas.microsoft.com/office/powerpoint/2010/main">
+    <mc:Choice Requires="p14">
       <p:transition spd="med" p14:dur="700">
         <p:fade thruBlk="1"/>
       </p:transition>
     </mc:Choice>
-    <mc:Fallback>
+    <mc:Fallback xmlns="">
       <p:transition spd="med">
         <p:fade thruBlk="1"/>
       </p:transition>
@@ -10376,13 +10376,13 @@
   <p:clrMapOvr>
     <a:masterClrMapping/>
   </p:clrMapOvr>
-  <mc:AlternateContent xmlns:mc="http://schemas.openxmlformats.org/markup-compatibility/2006">
-    <mc:Choice xmlns:p14="http://schemas.microsoft.com/office/powerpoint/2010/main" Requires="p14">
+  <mc:AlternateContent xmlns:mc="http://schemas.openxmlformats.org/markup-compatibility/2006" xmlns:p14="http://schemas.microsoft.com/office/powerpoint/2010/main">
+    <mc:Choice Requires="p14">
       <p:transition spd="med" p14:dur="700">
         <p:fade thruBlk="1"/>
       </p:transition>
     </mc:Choice>
-    <mc:Fallback>
+    <mc:Fallback xmlns="">
       <p:transition spd="med">
         <p:fade thruBlk="1"/>
       </p:transition>
@@ -11554,13 +11554,13 @@
   <p:clrMapOvr>
     <a:masterClrMapping/>
   </p:clrMapOvr>
-  <mc:AlternateContent xmlns:mc="http://schemas.openxmlformats.org/markup-compatibility/2006">
-    <mc:Choice xmlns:p14="http://schemas.microsoft.com/office/powerpoint/2010/main" Requires="p14">
+  <mc:AlternateContent xmlns:mc="http://schemas.openxmlformats.org/markup-compatibility/2006" xmlns:p14="http://schemas.microsoft.com/office/powerpoint/2010/main">
+    <mc:Choice Requires="p14">
       <p:transition spd="med" p14:dur="700">
         <p:fade thruBlk="1"/>
       </p:transition>
     </mc:Choice>
-    <mc:Fallback>
+    <mc:Fallback xmlns="">
       <p:transition spd="med">
         <p:fade thruBlk="1"/>
       </p:transition>
@@ -14287,13 +14287,13 @@
   <p:clrMapOvr>
     <a:masterClrMapping/>
   </p:clrMapOvr>
-  <mc:AlternateContent xmlns:mc="http://schemas.openxmlformats.org/markup-compatibility/2006">
-    <mc:Choice xmlns:p14="http://schemas.microsoft.com/office/powerpoint/2010/main" Requires="p14">
+  <mc:AlternateContent xmlns:mc="http://schemas.openxmlformats.org/markup-compatibility/2006" xmlns:p14="http://schemas.microsoft.com/office/powerpoint/2010/main">
+    <mc:Choice Requires="p14">
       <p:transition spd="med" p14:dur="700">
         <p:fade thruBlk="1"/>
       </p:transition>
     </mc:Choice>
-    <mc:Fallback>
+    <mc:Fallback xmlns="">
       <p:transition spd="med">
         <p:fade thruBlk="1"/>
       </p:transition>
@@ -15299,13 +15299,13 @@
   <p:clrMapOvr>
     <a:masterClrMapping/>
   </p:clrMapOvr>
-  <mc:AlternateContent xmlns:mc="http://schemas.openxmlformats.org/markup-compatibility/2006">
-    <mc:Choice xmlns:p14="http://schemas.microsoft.com/office/powerpoint/2010/main" Requires="p14">
+  <mc:AlternateContent xmlns:mc="http://schemas.openxmlformats.org/markup-compatibility/2006" xmlns:p14="http://schemas.microsoft.com/office/powerpoint/2010/main">
+    <mc:Choice Requires="p14">
       <p:transition spd="med" p14:dur="700">
         <p:fade thruBlk="1"/>
       </p:transition>
     </mc:Choice>
-    <mc:Fallback>
+    <mc:Fallback xmlns="">
       <p:transition spd="med">
         <p:fade thruBlk="1"/>
       </p:transition>
@@ -16547,13 +16547,13 @@
   <p:clrMapOvr>
     <a:masterClrMapping/>
   </p:clrMapOvr>
-  <mc:AlternateContent xmlns:mc="http://schemas.openxmlformats.org/markup-compatibility/2006">
-    <mc:Choice xmlns:p14="http://schemas.microsoft.com/office/powerpoint/2010/main" Requires="p14">
+  <mc:AlternateContent xmlns:mc="http://schemas.openxmlformats.org/markup-compatibility/2006" xmlns:p14="http://schemas.microsoft.com/office/powerpoint/2010/main">
+    <mc:Choice Requires="p14">
       <p:transition spd="med" p14:dur="700">
         <p:fade thruBlk="1"/>
       </p:transition>
     </mc:Choice>
-    <mc:Fallback>
+    <mc:Fallback xmlns="">
       <p:transition spd="med">
         <p:fade thruBlk="1"/>
       </p:transition>
@@ -18379,13 +18379,13 @@
   <p:clrMapOvr>
     <a:masterClrMapping/>
   </p:clrMapOvr>
-  <mc:AlternateContent xmlns:mc="http://schemas.openxmlformats.org/markup-compatibility/2006">
-    <mc:Choice xmlns:p14="http://schemas.microsoft.com/office/powerpoint/2010/main" Requires="p14">
+  <mc:AlternateContent xmlns:mc="http://schemas.openxmlformats.org/markup-compatibility/2006" xmlns:p14="http://schemas.microsoft.com/office/powerpoint/2010/main">
+    <mc:Choice Requires="p14">
       <p:transition spd="med" p14:dur="700">
         <p:fade thruBlk="1"/>
       </p:transition>
     </mc:Choice>
-    <mc:Fallback>
+    <mc:Fallback xmlns="">
       <p:transition spd="med">
         <p:fade thruBlk="1"/>
       </p:transition>
@@ -20232,13 +20232,13 @@
   <p:clrMapOvr>
     <a:masterClrMapping/>
   </p:clrMapOvr>
-  <mc:AlternateContent xmlns:mc="http://schemas.openxmlformats.org/markup-compatibility/2006">
-    <mc:Choice xmlns:p14="http://schemas.microsoft.com/office/powerpoint/2010/main" Requires="p14">
+  <mc:AlternateContent xmlns:mc="http://schemas.openxmlformats.org/markup-compatibility/2006" xmlns:p14="http://schemas.microsoft.com/office/powerpoint/2010/main">
+    <mc:Choice Requires="p14">
       <p:transition spd="med" p14:dur="700">
         <p:fade thruBlk="1"/>
       </p:transition>
     </mc:Choice>
-    <mc:Fallback>
+    <mc:Fallback xmlns="">
       <p:transition spd="med">
         <p:fade thruBlk="1"/>
       </p:transition>
@@ -24197,13 +24197,13 @@
   <p:clrMapOvr>
     <a:masterClrMapping/>
   </p:clrMapOvr>
-  <mc:AlternateContent xmlns:mc="http://schemas.openxmlformats.org/markup-compatibility/2006">
-    <mc:Choice xmlns:p14="http://schemas.microsoft.com/office/powerpoint/2010/main" Requires="p14">
+  <mc:AlternateContent xmlns:mc="http://schemas.openxmlformats.org/markup-compatibility/2006" xmlns:p14="http://schemas.microsoft.com/office/powerpoint/2010/main">
+    <mc:Choice Requires="p14">
       <p:transition spd="med" p14:dur="700">
         <p:fade thruBlk="1"/>
       </p:transition>
     </mc:Choice>
-    <mc:Fallback>
+    <mc:Fallback xmlns="">
       <p:transition spd="med">
         <p:fade thruBlk="1"/>
       </p:transition>
@@ -25404,13 +25404,13 @@
   <p:clrMapOvr>
     <a:masterClrMapping/>
   </p:clrMapOvr>
-  <mc:AlternateContent xmlns:mc="http://schemas.openxmlformats.org/markup-compatibility/2006">
-    <mc:Choice xmlns:p14="http://schemas.microsoft.com/office/powerpoint/2010/main" Requires="p14">
+  <mc:AlternateContent xmlns:mc="http://schemas.openxmlformats.org/markup-compatibility/2006" xmlns:p14="http://schemas.microsoft.com/office/powerpoint/2010/main">
+    <mc:Choice Requires="p14">
       <p:transition spd="med" p14:dur="700">
         <p:fade thruBlk="1"/>
       </p:transition>
     </mc:Choice>
-    <mc:Fallback>
+    <mc:Fallback xmlns="">
       <p:transition spd="med">
         <p:fade thruBlk="1"/>
       </p:transition>
@@ -27243,13 +27243,13 @@
   <p:clrMapOvr>
     <a:masterClrMapping/>
   </p:clrMapOvr>
-  <mc:AlternateContent xmlns:mc="http://schemas.openxmlformats.org/markup-compatibility/2006">
-    <mc:Choice xmlns:p14="http://schemas.microsoft.com/office/powerpoint/2010/main" Requires="p14">
+  <mc:AlternateContent xmlns:mc="http://schemas.openxmlformats.org/markup-compatibility/2006" xmlns:p14="http://schemas.microsoft.com/office/powerpoint/2010/main">
+    <mc:Choice Requires="p14">
       <p:transition spd="med" p14:dur="700">
         <p:fade thruBlk="1"/>
       </p:transition>
     </mc:Choice>
-    <mc:Fallback>
+    <mc:Fallback xmlns="">
       <p:transition spd="med">
         <p:fade thruBlk="1"/>
       </p:transition>
@@ -29051,13 +29051,13 @@
   <p:clrMapOvr>
     <a:masterClrMapping/>
   </p:clrMapOvr>
-  <mc:AlternateContent xmlns:mc="http://schemas.openxmlformats.org/markup-compatibility/2006">
-    <mc:Choice xmlns:p14="http://schemas.microsoft.com/office/powerpoint/2010/main" Requires="p14">
+  <mc:AlternateContent xmlns:mc="http://schemas.openxmlformats.org/markup-compatibility/2006" xmlns:p14="http://schemas.microsoft.com/office/powerpoint/2010/main">
+    <mc:Choice Requires="p14">
       <p:transition spd="med" p14:dur="700">
         <p:fade thruBlk="1"/>
       </p:transition>
     </mc:Choice>
-    <mc:Fallback>
+    <mc:Fallback xmlns="">
       <p:transition spd="med">
         <p:fade thruBlk="1"/>
       </p:transition>
@@ -30574,13 +30574,13 @@
   <p:clrMapOvr>
     <a:masterClrMapping/>
   </p:clrMapOvr>
-  <mc:AlternateContent xmlns:mc="http://schemas.openxmlformats.org/markup-compatibility/2006">
-    <mc:Choice xmlns:p14="http://schemas.microsoft.com/office/powerpoint/2010/main" Requires="p14">
+  <mc:AlternateContent xmlns:mc="http://schemas.openxmlformats.org/markup-compatibility/2006" xmlns:p14="http://schemas.microsoft.com/office/powerpoint/2010/main">
+    <mc:Choice Requires="p14">
       <p:transition spd="med" p14:dur="700">
         <p:fade thruBlk="1"/>
       </p:transition>
     </mc:Choice>
-    <mc:Fallback>
+    <mc:Fallback xmlns="">
       <p:transition spd="med">
         <p:fade thruBlk="1"/>
       </p:transition>
@@ -31166,13 +31166,13 @@
   <p:clrMapOvr>
     <a:masterClrMapping/>
   </p:clrMapOvr>
-  <mc:AlternateContent xmlns:mc="http://schemas.openxmlformats.org/markup-compatibility/2006">
-    <mc:Choice xmlns:p14="http://schemas.microsoft.com/office/powerpoint/2010/main" Requires="p14">
+  <mc:AlternateContent xmlns:mc="http://schemas.openxmlformats.org/markup-compatibility/2006" xmlns:p14="http://schemas.microsoft.com/office/powerpoint/2010/main">
+    <mc:Choice Requires="p14">
       <p:transition spd="med" p14:dur="700">
         <p:fade thruBlk="1"/>
       </p:transition>
     </mc:Choice>
-    <mc:Fallback>
+    <mc:Fallback xmlns="">
       <p:transition spd="med">
         <p:fade thruBlk="1"/>
       </p:transition>
@@ -32115,13 +32115,13 @@
   <p:clrMapOvr>
     <a:masterClrMapping/>
   </p:clrMapOvr>
-  <mc:AlternateContent xmlns:mc="http://schemas.openxmlformats.org/markup-compatibility/2006">
-    <mc:Choice xmlns:p14="http://schemas.microsoft.com/office/powerpoint/2010/main" Requires="p14">
+  <mc:AlternateContent xmlns:mc="http://schemas.openxmlformats.org/markup-compatibility/2006" xmlns:p14="http://schemas.microsoft.com/office/powerpoint/2010/main">
+    <mc:Choice Requires="p14">
       <p:transition spd="med" p14:dur="700">
         <p:fade thruBlk="1"/>
       </p:transition>
     </mc:Choice>
-    <mc:Fallback>
+    <mc:Fallback xmlns="">
       <p:transition spd="med">
         <p:fade thruBlk="1"/>
       </p:transition>
@@ -34028,13 +34028,13 @@
   <p:clrMapOvr>
     <a:masterClrMapping/>
   </p:clrMapOvr>
-  <mc:AlternateContent xmlns:mc="http://schemas.openxmlformats.org/markup-compatibility/2006">
-    <mc:Choice xmlns:p14="http://schemas.microsoft.com/office/powerpoint/2010/main" Requires="p14">
+  <mc:AlternateContent xmlns:mc="http://schemas.openxmlformats.org/markup-compatibility/2006" xmlns:p14="http://schemas.microsoft.com/office/powerpoint/2010/main">
+    <mc:Choice Requires="p14">
       <p:transition spd="med" p14:dur="700">
         <p:fade thruBlk="1"/>
       </p:transition>
     </mc:Choice>
-    <mc:Fallback>
+    <mc:Fallback xmlns="">
       <p:transition spd="med">
         <p:fade thruBlk="1"/>
       </p:transition>
@@ -35895,13 +35895,13 @@
   <p:clrMapOvr>
     <a:masterClrMapping/>
   </p:clrMapOvr>
-  <mc:AlternateContent xmlns:mc="http://schemas.openxmlformats.org/markup-compatibility/2006">
-    <mc:Choice xmlns:p14="http://schemas.microsoft.com/office/powerpoint/2010/main" Requires="p14">
+  <mc:AlternateContent xmlns:mc="http://schemas.openxmlformats.org/markup-compatibility/2006" xmlns:p14="http://schemas.microsoft.com/office/powerpoint/2010/main">
+    <mc:Choice Requires="p14">
       <p:transition spd="med" p14:dur="700">
         <p:fade thruBlk="1"/>
       </p:transition>
     </mc:Choice>
-    <mc:Fallback>
+    <mc:Fallback xmlns="">
       <p:transition spd="med">
         <p:fade thruBlk="1"/>
       </p:transition>
@@ -36686,8 +36686,8 @@
         </p:nvSpPr>
         <p:spPr>
           <a:xfrm>
-            <a:off x="502920" y="1874520"/>
-            <a:ext cx="4206240" cy="2648145"/>
+            <a:off x="502920" y="1828800"/>
+            <a:ext cx="4663440" cy="2935987"/>
           </a:xfrm>
           <a:prstGeom prst="rect">
             <a:avLst/>
@@ -36726,8 +36726,8 @@
         </p:blipFill>
         <p:spPr>
           <a:xfrm>
-            <a:off x="502920" y="1874520"/>
-            <a:ext cx="4206240" cy="2648145"/>
+            <a:off x="502920" y="1828800"/>
+            <a:ext cx="4663440" cy="2935987"/>
           </a:xfrm>
           <a:prstGeom prst="rect">
             <a:avLst/>
@@ -36742,8 +36742,8 @@
         </p:nvSpPr>
         <p:spPr>
           <a:xfrm>
-            <a:off x="1411295" y="3722063"/>
-            <a:ext cx="2986861" cy="800602"/>
+            <a:off x="1510032" y="3877163"/>
+            <a:ext cx="3311520" cy="887624"/>
           </a:xfrm>
           <a:prstGeom prst="rect">
             <a:avLst/>
@@ -36776,8 +36776,8 @@
         </p:nvSpPr>
         <p:spPr>
           <a:xfrm>
-            <a:off x="502920" y="4595817"/>
-            <a:ext cx="4206240" cy="274320"/>
+            <a:off x="502920" y="4856227"/>
+            <a:ext cx="4663440" cy="274320"/>
           </a:xfrm>
           <a:prstGeom prst="rect">
             <a:avLst/>
@@ -36789,7 +36789,7 @@
           <a:bodyPr wrap="square" lIns="0" tIns="0" rIns="0" bIns="0" rtlCol="0" anchor="ctr"/>
           <a:lstStyle/>
           <a:p>
-            <a:pPr marL="0" indent="0" algn="ctr">
+            <a:pPr marL="0" indent="0">
               <a:buNone/>
             </a:pPr>
             <a:r>
@@ -36801,15 +36801,107 @@
                 <a:ea typeface="微软雅黑" pitchFamily="34" charset="-122"/>
                 <a:cs typeface="微软雅黑" pitchFamily="34" charset="-120"/>
               </a:rPr>
-              <a:t>完整扫描结果（已脱敏）</a:t>
+              <a:t>完整扫描结果（已脱敏）· 蓝框区域见右侧放大</a:t>
             </a:r>
             <a:endParaRPr lang="en-US" sz="1150" dirty="0"/>
+          </a:p>
+        </p:txBody>
+      </p:sp>
+      <p:sp>
+        <p:nvSpPr>
+          <p:cNvPr id="10" name="Text 7"/>
+          <p:cNvSpPr/>
+          <p:nvPr/>
+        </p:nvSpPr>
+        <p:spPr>
+          <a:xfrm>
+            <a:off x="502920" y="5349240"/>
+            <a:ext cx="5120640" cy="1188720"/>
+          </a:xfrm>
+          <a:prstGeom prst="rect">
+            <a:avLst/>
+          </a:prstGeom>
+          <a:noFill/>
+          <a:ln/>
+        </p:spPr>
+        <p:txBody>
+          <a:bodyPr wrap="square" lIns="0" tIns="0" rIns="0" bIns="0" rtlCol="0" anchor="ctr"/>
+          <a:lstStyle/>
+          <a:p>
+            <a:pPr marL="0" indent="0">
+              <a:lnSpc>
+                <a:spcPts val="2000"/>
+              </a:lnSpc>
+              <a:buNone/>
+            </a:pPr>
+            <a:r>
+              <a:rPr lang="en-US" sz="1250" b="1" dirty="0">
+                <a:solidFill>
+                  <a:srgbClr val="3B82F6"/>
+                </a:solidFill>
+                <a:latin typeface="微软雅黑" pitchFamily="34" charset="0"/>
+                <a:ea typeface="微软雅黑" pitchFamily="34" charset="-122"/>
+                <a:cs typeface="微软雅黑" pitchFamily="34" charset="-120"/>
+              </a:rPr>
+              <a:t>设计要点  </a:t>
+            </a:r>
+            <a:r>
+              <a:rPr lang="en-US" sz="1250" dirty="0">
+                <a:solidFill>
+                  <a:srgbClr val="1A1A1A"/>
+                </a:solidFill>
+                <a:latin typeface="微软雅黑" pitchFamily="34" charset="0"/>
+                <a:ea typeface="微软雅黑" pitchFamily="34" charset="-122"/>
+                <a:cs typeface="微软雅黑" pitchFamily="34" charset="-120"/>
+              </a:rPr>
+              <a:t>高亮区域为漏洞情报关联表，右图为 1.9 倍放大：严重度徽章、确认受影响 CVE、来源双源标注逐行可读；每个分区都可展开原始证据，逐条人工复核。</a:t>
+            </a:r>
+            <a:endParaRPr lang="en-US" sz="1250" dirty="0"/>
+          </a:p>
+        </p:txBody>
+      </p:sp>
+      <p:sp>
+        <p:nvSpPr>
+          <p:cNvPr id="11" name="Shape 8"/>
+          <p:cNvSpPr/>
+          <p:nvPr/>
+        </p:nvSpPr>
+        <p:spPr>
+          <a:xfrm>
+            <a:off x="5696712" y="1828800"/>
+            <a:ext cx="5989320" cy="1698003"/>
+          </a:xfrm>
+          <a:prstGeom prst="rect">
+            <a:avLst/>
+          </a:prstGeom>
+          <a:solidFill>
+            <a:srgbClr val="FFFFFF"/>
+          </a:solidFill>
+          <a:ln w="12700">
+            <a:solidFill>
+              <a:srgbClr val="E2E8F0"/>
+            </a:solidFill>
+            <a:prstDash val="solid"/>
+          </a:ln>
+          <a:effectLst>
+            <a:outerShdw blurRad="127000" dist="38100" dir="2700000" algn="bl" rotWithShape="0">
+              <a:srgbClr val="000000">
+                <a:alpha val="18000"/>
+              </a:srgbClr>
+            </a:outerShdw>
+          </a:effectLst>
+        </p:spPr>
+        <p:txBody>
+          <a:bodyPr/>
+          <a:lstStyle/>
+          <a:p>
+            <a:endParaRPr lang="zh-CN" altLang="en-US"/>
           </a:p>
         </p:txBody>
       </p:sp>
       <p:pic>
         <p:nvPicPr>
-          <p:cNvPr id="10" name="Image 1" descr="D:/fengqiao/Desktop/26-08python实训/实训考核2/docs/build/img/detail_intel.png"/>
+          <p:cNvPr id="12" name="Image 1" descr="D:/fengqiao/Desktop/26-08python实训/实训考核2/docs/build/img/detail_intel.png"/>
           <p:cNvPicPr>
             <a:picLocks noChangeAspect="1"/>
           </p:cNvPicPr>
@@ -36823,8 +36915,8 @@
         </p:blipFill>
         <p:spPr>
           <a:xfrm>
-            <a:off x="4892040" y="1874520"/>
-            <a:ext cx="6766560" cy="1920240"/>
+            <a:off x="5696712" y="1828800"/>
+            <a:ext cx="5989320" cy="1698003"/>
           </a:xfrm>
           <a:prstGeom prst="rect">
             <a:avLst/>
@@ -36833,48 +36925,14 @@
       </p:pic>
       <p:sp>
         <p:nvSpPr>
-          <p:cNvPr id="11" name="Shape 7"/>
+          <p:cNvPr id="13" name="Text 9"/>
           <p:cNvSpPr/>
           <p:nvPr/>
         </p:nvSpPr>
         <p:spPr>
           <a:xfrm>
-            <a:off x="4892040" y="1874520"/>
-            <a:ext cx="6766560" cy="1810512"/>
-          </a:xfrm>
-          <a:prstGeom prst="rect">
-            <a:avLst/>
-          </a:prstGeom>
-          <a:solidFill>
-            <a:srgbClr val="000000">
-              <a:alpha val="0"/>
-            </a:srgbClr>
-          </a:solidFill>
-          <a:ln w="12700">
-            <a:solidFill>
-              <a:srgbClr val="E2E8F0"/>
-            </a:solidFill>
-            <a:prstDash val="solid"/>
-          </a:ln>
-        </p:spPr>
-        <p:txBody>
-          <a:bodyPr/>
-          <a:lstStyle/>
-          <a:p>
-            <a:endParaRPr lang="zh-CN" altLang="en-US"/>
-          </a:p>
-        </p:txBody>
-      </p:sp>
-      <p:sp>
-        <p:nvSpPr>
-          <p:cNvPr id="12" name="Text 8"/>
-          <p:cNvSpPr/>
-          <p:nvPr/>
-        </p:nvSpPr>
-        <p:spPr>
-          <a:xfrm>
-            <a:off x="4892040" y="3749040"/>
-            <a:ext cx="6766560" cy="292608"/>
+            <a:off x="5696712" y="3618243"/>
+            <a:ext cx="5989320" cy="274320"/>
           </a:xfrm>
           <a:prstGeom prst="rect">
             <a:avLst/>
@@ -36906,14 +36964,77 @@
       </p:sp>
       <p:sp>
         <p:nvSpPr>
-          <p:cNvPr id="13" name="Text 9"/>
+          <p:cNvPr id="14" name="Shape 10"/>
           <p:cNvSpPr/>
           <p:nvPr/>
         </p:nvSpPr>
         <p:spPr>
           <a:xfrm>
-            <a:off x="502920" y="4251960"/>
-            <a:ext cx="11183112" cy="457200"/>
+            <a:off x="7274052" y="4029723"/>
+            <a:ext cx="2834640" cy="2725615"/>
+          </a:xfrm>
+          <a:prstGeom prst="rect">
+            <a:avLst/>
+          </a:prstGeom>
+          <a:solidFill>
+            <a:srgbClr val="FFFFFF"/>
+          </a:solidFill>
+          <a:ln w="12700">
+            <a:solidFill>
+              <a:srgbClr val="E2E8F0"/>
+            </a:solidFill>
+            <a:prstDash val="solid"/>
+          </a:ln>
+          <a:effectLst>
+            <a:outerShdw blurRad="127000" dist="38100" dir="2700000" algn="bl" rotWithShape="0">
+              <a:srgbClr val="000000">
+                <a:alpha val="18000"/>
+              </a:srgbClr>
+            </a:outerShdw>
+          </a:effectLst>
+        </p:spPr>
+        <p:txBody>
+          <a:bodyPr/>
+          <a:lstStyle/>
+          <a:p>
+            <a:endParaRPr lang="zh-CN" altLang="en-US"/>
+          </a:p>
+        </p:txBody>
+      </p:sp>
+      <p:pic>
+        <p:nvPicPr>
+          <p:cNvPr id="15" name="Image 2" descr="D:/fengqiao/Desktop/26-08python实训/实训考核2/docs/build/img/detail_badges.png"/>
+          <p:cNvPicPr>
+            <a:picLocks noChangeAspect="1"/>
+          </p:cNvPicPr>
+          <p:nvPr/>
+        </p:nvPicPr>
+        <p:blipFill>
+          <a:blip r:embed="rId6"/>
+          <a:stretch>
+            <a:fillRect/>
+          </a:stretch>
+        </p:blipFill>
+        <p:spPr>
+          <a:xfrm>
+            <a:off x="7274052" y="4029723"/>
+            <a:ext cx="2834640" cy="2725615"/>
+          </a:xfrm>
+          <a:prstGeom prst="rect">
+            <a:avLst/>
+          </a:prstGeom>
+        </p:spPr>
+      </p:pic>
+      <p:sp>
+        <p:nvSpPr>
+          <p:cNvPr id="16" name="Text 11"/>
+          <p:cNvSpPr/>
+          <p:nvPr/>
+        </p:nvSpPr>
+        <p:spPr>
+          <a:xfrm>
+            <a:off x="6999732" y="6828490"/>
+            <a:ext cx="3383280" cy="274320"/>
           </a:xfrm>
           <a:prstGeom prst="rect">
             <a:avLst/>
@@ -36925,35 +37046,21 @@
           <a:bodyPr wrap="square" lIns="0" tIns="0" rIns="0" bIns="0" rtlCol="0" anchor="ctr"/>
           <a:lstStyle/>
           <a:p>
-            <a:pPr marL="0" indent="0">
-              <a:lnSpc>
-                <a:spcPts val="1900"/>
-              </a:lnSpc>
+            <a:pPr marL="0" indent="0" algn="ctr">
               <a:buNone/>
             </a:pPr>
             <a:r>
-              <a:rPr lang="en-US" sz="1250" b="1" dirty="0">
+              <a:rPr lang="en-US" sz="1050" dirty="0">
                 <a:solidFill>
-                  <a:srgbClr val="3B82F6"/>
+                  <a:srgbClr val="64748B"/>
                 </a:solidFill>
                 <a:latin typeface="微软雅黑" pitchFamily="34" charset="0"/>
                 <a:ea typeface="微软雅黑" pitchFamily="34" charset="-122"/>
                 <a:cs typeface="微软雅黑" pitchFamily="34" charset="-120"/>
               </a:rPr>
-              <a:t>设计要点  </a:t>
-            </a:r>
-            <a:r>
-              <a:rPr lang="en-US" sz="1250" dirty="0">
-                <a:solidFill>
-                  <a:srgbClr val="1A1A1A"/>
-                </a:solidFill>
-                <a:latin typeface="微软雅黑" pitchFamily="34" charset="0"/>
-                <a:ea typeface="微软雅黑" pitchFamily="34" charset="-122"/>
-                <a:cs typeface="微软雅黑" pitchFamily="34" charset="-120"/>
-              </a:rPr>
-              <a:t>结果页每个分区都可展开原始证据；情报表按严重度排序、来源双源标注；结论与证据一一对应，可逐条人工复核。</a:t>
-            </a:r>
-            <a:endParaRPr lang="en-US" sz="1250" dirty="0"/>
+              <a:t>组件徽章放大：识别证据逐项可读</a:t>
+            </a:r>
+            <a:endParaRPr lang="en-US" sz="1050" dirty="0"/>
           </a:p>
         </p:txBody>
       </p:sp>
@@ -36998,7 +37105,7 @@
                             </p:stCondLst>
                             <p:childTnLst>
                               <p:par>
-                                <p:cTn id="5" presetID="10" presetClass="entr" presetSubtype="0" fill="hold" grpId="0" nodeType="withEffect">
+                                <p:cTn id="5" presetID="10" presetClass="entr" presetSubtype="0" fill="hold" grpId="0" nodeType="afterEffect">
                                   <p:stCondLst>
                                     <p:cond delay="0"/>
                                   </p:stCondLst>
@@ -37023,7 +37130,7 @@
                                     </p:set>
                                     <p:animEffect transition="in" filter="fade">
                                       <p:cBhvr>
-                                        <p:cTn id="7" dur="400"/>
+                                        <p:cTn id="7" dur="350"/>
                                         <p:tgtEl>
                                           <p:spTgt spid="2"/>
                                         </p:tgtEl>
@@ -37032,15 +37139,24 @@
                                   </p:childTnLst>
                                 </p:cTn>
                               </p:par>
+                            </p:childTnLst>
+                          </p:cTn>
+                        </p:par>
+                        <p:par>
+                          <p:cTn id="8" fill="hold">
+                            <p:stCondLst>
+                              <p:cond delay="350"/>
+                            </p:stCondLst>
+                            <p:childTnLst>
                               <p:par>
-                                <p:cTn id="8" presetID="10" presetClass="entr" presetSubtype="0" fill="hold" grpId="0" nodeType="withEffect">
+                                <p:cTn id="9" presetID="10" presetClass="entr" presetSubtype="0" fill="hold" grpId="0" nodeType="afterEffect">
                                   <p:stCondLst>
-                                    <p:cond delay="120"/>
+                                    <p:cond delay="140"/>
                                   </p:stCondLst>
                                   <p:childTnLst>
                                     <p:set>
                                       <p:cBhvr>
-                                        <p:cTn id="9" dur="1" fill="hold">
+                                        <p:cTn id="10" dur="1" fill="hold">
                                           <p:stCondLst>
                                             <p:cond delay="0"/>
                                           </p:stCondLst>
@@ -37058,7 +37174,7 @@
                                     </p:set>
                                     <p:animEffect transition="in" filter="fade">
                                       <p:cBhvr>
-                                        <p:cTn id="10" dur="400"/>
+                                        <p:cTn id="11" dur="350"/>
                                         <p:tgtEl>
                                           <p:spTgt spid="3"/>
                                         </p:tgtEl>
@@ -37067,15 +37183,24 @@
                                   </p:childTnLst>
                                 </p:cTn>
                               </p:par>
+                            </p:childTnLst>
+                          </p:cTn>
+                        </p:par>
+                        <p:par>
+                          <p:cTn id="12" fill="hold">
+                            <p:stCondLst>
+                              <p:cond delay="840"/>
+                            </p:stCondLst>
+                            <p:childTnLst>
                               <p:par>
-                                <p:cTn id="11" presetID="10" presetClass="entr" presetSubtype="0" fill="hold" grpId="0" nodeType="withEffect">
+                                <p:cTn id="13" presetID="10" presetClass="entr" presetSubtype="0" fill="hold" grpId="0" nodeType="afterEffect">
                                   <p:stCondLst>
-                                    <p:cond delay="240"/>
+                                    <p:cond delay="280"/>
                                   </p:stCondLst>
                                   <p:childTnLst>
                                     <p:set>
                                       <p:cBhvr>
-                                        <p:cTn id="12" dur="1" fill="hold">
+                                        <p:cTn id="14" dur="1" fill="hold">
                                           <p:stCondLst>
                                             <p:cond delay="0"/>
                                           </p:stCondLst>
@@ -37093,7 +37218,7 @@
                                     </p:set>
                                     <p:animEffect transition="in" filter="fade">
                                       <p:cBhvr>
-                                        <p:cTn id="13" dur="400"/>
+                                        <p:cTn id="15" dur="350"/>
                                         <p:tgtEl>
                                           <p:spTgt spid="4"/>
                                         </p:tgtEl>
@@ -37102,15 +37227,24 @@
                                   </p:childTnLst>
                                 </p:cTn>
                               </p:par>
+                            </p:childTnLst>
+                          </p:cTn>
+                        </p:par>
+                        <p:par>
+                          <p:cTn id="16" fill="hold">
+                            <p:stCondLst>
+                              <p:cond delay="1470"/>
+                            </p:stCondLst>
+                            <p:childTnLst>
                               <p:par>
-                                <p:cTn id="14" presetID="10" presetClass="entr" presetSubtype="0" fill="hold" grpId="0" nodeType="withEffect">
+                                <p:cTn id="17" presetID="10" presetClass="entr" presetSubtype="0" fill="hold" grpId="0" nodeType="afterEffect">
                                   <p:stCondLst>
-                                    <p:cond delay="360"/>
+                                    <p:cond delay="420"/>
                                   </p:stCondLst>
                                   <p:childTnLst>
                                     <p:set>
                                       <p:cBhvr>
-                                        <p:cTn id="15" dur="1" fill="hold">
+                                        <p:cTn id="18" dur="1" fill="hold">
                                           <p:stCondLst>
                                             <p:cond delay="0"/>
                                           </p:stCondLst>
@@ -37128,7 +37262,7 @@
                                     </p:set>
                                     <p:animEffect transition="in" filter="fade">
                                       <p:cBhvr>
-                                        <p:cTn id="16" dur="400"/>
+                                        <p:cTn id="19" dur="350"/>
                                         <p:tgtEl>
                                           <p:spTgt spid="5"/>
                                         </p:tgtEl>
@@ -37137,15 +37271,24 @@
                                   </p:childTnLst>
                                 </p:cTn>
                               </p:par>
+                            </p:childTnLst>
+                          </p:cTn>
+                        </p:par>
+                        <p:par>
+                          <p:cTn id="20" fill="hold">
+                            <p:stCondLst>
+                              <p:cond delay="2240"/>
+                            </p:stCondLst>
+                            <p:childTnLst>
                               <p:par>
-                                <p:cTn id="17" presetID="10" presetClass="entr" presetSubtype="0" fill="hold" grpId="0" nodeType="withEffect">
+                                <p:cTn id="21" presetID="10" presetClass="entr" presetSubtype="0" fill="hold" grpId="0" nodeType="afterEffect">
                                   <p:stCondLst>
-                                    <p:cond delay="480"/>
+                                    <p:cond delay="560"/>
                                   </p:stCondLst>
                                   <p:childTnLst>
                                     <p:set>
                                       <p:cBhvr>
-                                        <p:cTn id="18" dur="1" fill="hold">
+                                        <p:cTn id="22" dur="1" fill="hold">
                                           <p:stCondLst>
                                             <p:cond delay="0"/>
                                           </p:stCondLst>
@@ -37163,7 +37306,7 @@
                                     </p:set>
                                     <p:animEffect transition="in" filter="fade">
                                       <p:cBhvr>
-                                        <p:cTn id="19" dur="400"/>
+                                        <p:cTn id="23" dur="350"/>
                                         <p:tgtEl>
                                           <p:spTgt spid="6"/>
                                         </p:tgtEl>
@@ -37172,21 +37315,112 @@
                                   </p:childTnLst>
                                 </p:cTn>
                               </p:par>
+                            </p:childTnLst>
+                          </p:cTn>
+                        </p:par>
+                        <p:par>
+                          <p:cTn id="24" fill="hold">
+                            <p:stCondLst>
+                              <p:cond delay="3150"/>
+                            </p:stCondLst>
+                            <p:childTnLst>
                               <p:par>
-                                <p:cTn id="20" presetID="10" presetClass="entr" presetSubtype="0" fill="hold" nodeType="withEffect">
+                                <p:cTn id="25" presetID="23" presetClass="entr" presetSubtype="16" fill="hold" nodeType="afterEffect">
                                   <p:stCondLst>
-                                    <p:cond delay="600"/>
+                                    <p:cond delay="700"/>
                                   </p:stCondLst>
                                   <p:childTnLst>
                                     <p:set>
                                       <p:cBhvr>
-                                        <p:cTn id="21" dur="1" fill="hold">
+                                        <p:cTn id="26" dur="1" fill="hold">
                                           <p:stCondLst>
                                             <p:cond delay="0"/>
                                           </p:stCondLst>
                                         </p:cTn>
                                         <p:tgtEl>
                                           <p:spTgt spid="7"/>
+                                        </p:tgtEl>
+                                        <p:attrNameLst>
+                                          <p:attrName>style.visibility</p:attrName>
+                                        </p:attrNameLst>
+                                      </p:cBhvr>
+                                      <p:to>
+                                        <p:strVal val="visible"/>
+                                      </p:to>
+                                    </p:set>
+                                    <p:anim calcmode="lin" valueType="num">
+                                      <p:cBhvr>
+                                        <p:cTn id="27" dur="500" fill="hold"/>
+                                        <p:tgtEl>
+                                          <p:spTgt spid="7"/>
+                                        </p:tgtEl>
+                                        <p:attrNameLst>
+                                          <p:attrName>ppt_w</p:attrName>
+                                        </p:attrNameLst>
+                                      </p:cBhvr>
+                                      <p:tavLst>
+                                        <p:tav tm="0">
+                                          <p:val>
+                                            <p:fltVal val="0"/>
+                                          </p:val>
+                                        </p:tav>
+                                        <p:tav tm="100000">
+                                          <p:val>
+                                            <p:strVal val="#ppt_w"/>
+                                          </p:val>
+                                        </p:tav>
+                                      </p:tavLst>
+                                    </p:anim>
+                                    <p:anim calcmode="lin" valueType="num">
+                                      <p:cBhvr>
+                                        <p:cTn id="28" dur="500" fill="hold"/>
+                                        <p:tgtEl>
+                                          <p:spTgt spid="7"/>
+                                        </p:tgtEl>
+                                        <p:attrNameLst>
+                                          <p:attrName>ppt_h</p:attrName>
+                                        </p:attrNameLst>
+                                      </p:cBhvr>
+                                      <p:tavLst>
+                                        <p:tav tm="0">
+                                          <p:val>
+                                            <p:fltVal val="0"/>
+                                          </p:val>
+                                        </p:tav>
+                                        <p:tav tm="100000">
+                                          <p:val>
+                                            <p:strVal val="#ppt_h"/>
+                                          </p:val>
+                                        </p:tav>
+                                      </p:tavLst>
+                                    </p:anim>
+                                  </p:childTnLst>
+                                </p:cTn>
+                              </p:par>
+                            </p:childTnLst>
+                          </p:cTn>
+                        </p:par>
+                        <p:par>
+                          <p:cTn id="29" fill="hold">
+                            <p:stCondLst>
+                              <p:cond delay="4350"/>
+                            </p:stCondLst>
+                            <p:childTnLst>
+                              <p:par>
+                                <p:cTn id="30" presetID="10" presetClass="entr" presetSubtype="0" fill="hold" grpId="0" nodeType="afterEffect">
+                                  <p:stCondLst>
+                                    <p:cond delay="840"/>
+                                  </p:stCondLst>
+                                  <p:childTnLst>
+                                    <p:set>
+                                      <p:cBhvr>
+                                        <p:cTn id="31" dur="1" fill="hold">
+                                          <p:stCondLst>
+                                            <p:cond delay="0"/>
+                                          </p:stCondLst>
+                                        </p:cTn>
+                                        <p:tgtEl>
+                                          <p:spTgt spid="8"/>
                                         </p:tgtEl>
                                         <p:attrNameLst>
                                           <p:attrName>style.visibility</p:attrName>
@@ -37198,30 +37432,39 @@
                                     </p:set>
                                     <p:animEffect transition="in" filter="fade">
                                       <p:cBhvr>
-                                        <p:cTn id="22" dur="400"/>
-                                        <p:tgtEl>
-                                          <p:spTgt spid="7"/>
+                                        <p:cTn id="32" dur="350"/>
+                                        <p:tgtEl>
+                                          <p:spTgt spid="8"/>
                                         </p:tgtEl>
                                       </p:cBhvr>
                                     </p:animEffect>
                                   </p:childTnLst>
                                 </p:cTn>
                               </p:par>
+                            </p:childTnLst>
+                          </p:cTn>
+                        </p:par>
+                        <p:par>
+                          <p:cTn id="33" fill="hold">
+                            <p:stCondLst>
+                              <p:cond delay="5540"/>
+                            </p:stCondLst>
+                            <p:childTnLst>
                               <p:par>
-                                <p:cTn id="23" presetID="10" presetClass="entr" presetSubtype="0" fill="hold" grpId="0" nodeType="withEffect">
+                                <p:cTn id="34" presetID="10" presetClass="entr" presetSubtype="0" fill="hold" grpId="0" nodeType="afterEffect">
                                   <p:stCondLst>
-                                    <p:cond delay="720"/>
+                                    <p:cond delay="980"/>
                                   </p:stCondLst>
                                   <p:childTnLst>
                                     <p:set>
                                       <p:cBhvr>
-                                        <p:cTn id="24" dur="1" fill="hold">
+                                        <p:cTn id="35" dur="1" fill="hold">
                                           <p:stCondLst>
                                             <p:cond delay="0"/>
                                           </p:stCondLst>
                                         </p:cTn>
                                         <p:tgtEl>
-                                          <p:spTgt spid="8"/>
+                                          <p:spTgt spid="9"/>
                                         </p:tgtEl>
                                         <p:attrNameLst>
                                           <p:attrName>style.visibility</p:attrName>
@@ -37233,30 +37476,39 @@
                                     </p:set>
                                     <p:animEffect transition="in" filter="fade">
                                       <p:cBhvr>
-                                        <p:cTn id="25" dur="400"/>
-                                        <p:tgtEl>
-                                          <p:spTgt spid="8"/>
+                                        <p:cTn id="36" dur="350"/>
+                                        <p:tgtEl>
+                                          <p:spTgt spid="9"/>
                                         </p:tgtEl>
                                       </p:cBhvr>
                                     </p:animEffect>
                                   </p:childTnLst>
                                 </p:cTn>
                               </p:par>
+                            </p:childTnLst>
+                          </p:cTn>
+                        </p:par>
+                        <p:par>
+                          <p:cTn id="37" fill="hold">
+                            <p:stCondLst>
+                              <p:cond delay="6870"/>
+                            </p:stCondLst>
+                            <p:childTnLst>
                               <p:par>
-                                <p:cTn id="26" presetID="10" presetClass="entr" presetSubtype="0" fill="hold" grpId="0" nodeType="withEffect">
+                                <p:cTn id="38" presetID="10" presetClass="entr" presetSubtype="0" fill="hold" grpId="0" nodeType="afterEffect">
                                   <p:stCondLst>
-                                    <p:cond delay="840"/>
+                                    <p:cond delay="1120"/>
                                   </p:stCondLst>
                                   <p:childTnLst>
                                     <p:set>
                                       <p:cBhvr>
-                                        <p:cTn id="27" dur="1" fill="hold">
+                                        <p:cTn id="39" dur="1" fill="hold">
                                           <p:stCondLst>
                                             <p:cond delay="0"/>
                                           </p:stCondLst>
                                         </p:cTn>
                                         <p:tgtEl>
-                                          <p:spTgt spid="9"/>
+                                          <p:spTgt spid="10"/>
                                         </p:tgtEl>
                                         <p:attrNameLst>
                                           <p:attrName>style.visibility</p:attrName>
@@ -37268,30 +37520,39 @@
                                     </p:set>
                                     <p:animEffect transition="in" filter="fade">
                                       <p:cBhvr>
-                                        <p:cTn id="28" dur="400"/>
-                                        <p:tgtEl>
-                                          <p:spTgt spid="9"/>
+                                        <p:cTn id="40" dur="350"/>
+                                        <p:tgtEl>
+                                          <p:spTgt spid="10"/>
                                         </p:tgtEl>
                                       </p:cBhvr>
                                     </p:animEffect>
                                   </p:childTnLst>
                                 </p:cTn>
                               </p:par>
+                            </p:childTnLst>
+                          </p:cTn>
+                        </p:par>
+                        <p:par>
+                          <p:cTn id="41" fill="hold">
+                            <p:stCondLst>
+                              <p:cond delay="8340"/>
+                            </p:stCondLst>
+                            <p:childTnLst>
                               <p:par>
-                                <p:cTn id="29" presetID="10" presetClass="entr" presetSubtype="0" fill="hold" nodeType="withEffect">
+                                <p:cTn id="42" presetID="10" presetClass="entr" presetSubtype="0" fill="hold" grpId="0" nodeType="afterEffect">
                                   <p:stCondLst>
-                                    <p:cond delay="960"/>
+                                    <p:cond delay="1260"/>
                                   </p:stCondLst>
                                   <p:childTnLst>
                                     <p:set>
                                       <p:cBhvr>
-                                        <p:cTn id="30" dur="1" fill="hold">
+                                        <p:cTn id="43" dur="1" fill="hold">
                                           <p:stCondLst>
                                             <p:cond delay="0"/>
                                           </p:stCondLst>
                                         </p:cTn>
                                         <p:tgtEl>
-                                          <p:spTgt spid="10"/>
+                                          <p:spTgt spid="11"/>
                                         </p:tgtEl>
                                         <p:attrNameLst>
                                           <p:attrName>style.visibility</p:attrName>
@@ -37303,30 +37564,121 @@
                                     </p:set>
                                     <p:animEffect transition="in" filter="fade">
                                       <p:cBhvr>
-                                        <p:cTn id="31" dur="400"/>
-                                        <p:tgtEl>
-                                          <p:spTgt spid="10"/>
+                                        <p:cTn id="44" dur="350"/>
+                                        <p:tgtEl>
+                                          <p:spTgt spid="11"/>
                                         </p:tgtEl>
                                       </p:cBhvr>
                                     </p:animEffect>
                                   </p:childTnLst>
                                 </p:cTn>
                               </p:par>
+                            </p:childTnLst>
+                          </p:cTn>
+                        </p:par>
+                        <p:par>
+                          <p:cTn id="45" fill="hold">
+                            <p:stCondLst>
+                              <p:cond delay="9950"/>
+                            </p:stCondLst>
+                            <p:childTnLst>
                               <p:par>
-                                <p:cTn id="32" presetID="10" presetClass="entr" presetSubtype="0" fill="hold" grpId="0" nodeType="withEffect">
+                                <p:cTn id="46" presetID="23" presetClass="entr" presetSubtype="16" fill="hold" nodeType="afterEffect">
                                   <p:stCondLst>
-                                    <p:cond delay="1080"/>
+                                    <p:cond delay="1400"/>
                                   </p:stCondLst>
                                   <p:childTnLst>
                                     <p:set>
                                       <p:cBhvr>
-                                        <p:cTn id="33" dur="1" fill="hold">
+                                        <p:cTn id="47" dur="1" fill="hold">
                                           <p:stCondLst>
                                             <p:cond delay="0"/>
                                           </p:stCondLst>
                                         </p:cTn>
                                         <p:tgtEl>
-                                          <p:spTgt spid="11"/>
+                                          <p:spTgt spid="12"/>
+                                        </p:tgtEl>
+                                        <p:attrNameLst>
+                                          <p:attrName>style.visibility</p:attrName>
+                                        </p:attrNameLst>
+                                      </p:cBhvr>
+                                      <p:to>
+                                        <p:strVal val="visible"/>
+                                      </p:to>
+                                    </p:set>
+                                    <p:anim calcmode="lin" valueType="num">
+                                      <p:cBhvr>
+                                        <p:cTn id="48" dur="500" fill="hold"/>
+                                        <p:tgtEl>
+                                          <p:spTgt spid="12"/>
+                                        </p:tgtEl>
+                                        <p:attrNameLst>
+                                          <p:attrName>ppt_w</p:attrName>
+                                        </p:attrNameLst>
+                                      </p:cBhvr>
+                                      <p:tavLst>
+                                        <p:tav tm="0">
+                                          <p:val>
+                                            <p:fltVal val="0"/>
+                                          </p:val>
+                                        </p:tav>
+                                        <p:tav tm="100000">
+                                          <p:val>
+                                            <p:strVal val="#ppt_w"/>
+                                          </p:val>
+                                        </p:tav>
+                                      </p:tavLst>
+                                    </p:anim>
+                                    <p:anim calcmode="lin" valueType="num">
+                                      <p:cBhvr>
+                                        <p:cTn id="49" dur="500" fill="hold"/>
+                                        <p:tgtEl>
+                                          <p:spTgt spid="12"/>
+                                        </p:tgtEl>
+                                        <p:attrNameLst>
+                                          <p:attrName>ppt_h</p:attrName>
+                                        </p:attrNameLst>
+                                      </p:cBhvr>
+                                      <p:tavLst>
+                                        <p:tav tm="0">
+                                          <p:val>
+                                            <p:fltVal val="0"/>
+                                          </p:val>
+                                        </p:tav>
+                                        <p:tav tm="100000">
+                                          <p:val>
+                                            <p:strVal val="#ppt_h"/>
+                                          </p:val>
+                                        </p:tav>
+                                      </p:tavLst>
+                                    </p:anim>
+                                  </p:childTnLst>
+                                </p:cTn>
+                              </p:par>
+                            </p:childTnLst>
+                          </p:cTn>
+                        </p:par>
+                        <p:par>
+                          <p:cTn id="50" fill="hold">
+                            <p:stCondLst>
+                              <p:cond delay="11850"/>
+                            </p:stCondLst>
+                            <p:childTnLst>
+                              <p:par>
+                                <p:cTn id="51" presetID="10" presetClass="entr" presetSubtype="0" fill="hold" grpId="0" nodeType="afterEffect">
+                                  <p:stCondLst>
+                                    <p:cond delay="1540"/>
+                                  </p:stCondLst>
+                                  <p:childTnLst>
+                                    <p:set>
+                                      <p:cBhvr>
+                                        <p:cTn id="52" dur="1" fill="hold">
+                                          <p:stCondLst>
+                                            <p:cond delay="0"/>
+                                          </p:stCondLst>
+                                        </p:cTn>
+                                        <p:tgtEl>
+                                          <p:spTgt spid="13"/>
                                         </p:tgtEl>
                                         <p:attrNameLst>
                                           <p:attrName>style.visibility</p:attrName>
@@ -37338,30 +37690,39 @@
                                     </p:set>
                                     <p:animEffect transition="in" filter="fade">
                                       <p:cBhvr>
-                                        <p:cTn id="34" dur="400"/>
-                                        <p:tgtEl>
-                                          <p:spTgt spid="11"/>
+                                        <p:cTn id="53" dur="350"/>
+                                        <p:tgtEl>
+                                          <p:spTgt spid="13"/>
                                         </p:tgtEl>
                                       </p:cBhvr>
                                     </p:animEffect>
                                   </p:childTnLst>
                                 </p:cTn>
                               </p:par>
+                            </p:childTnLst>
+                          </p:cTn>
+                        </p:par>
+                        <p:par>
+                          <p:cTn id="54" fill="hold">
+                            <p:stCondLst>
+                              <p:cond delay="13740"/>
+                            </p:stCondLst>
+                            <p:childTnLst>
                               <p:par>
-                                <p:cTn id="35" presetID="10" presetClass="entr" presetSubtype="0" fill="hold" grpId="0" nodeType="withEffect">
+                                <p:cTn id="55" presetID="10" presetClass="entr" presetSubtype="0" fill="hold" grpId="0" nodeType="afterEffect">
                                   <p:stCondLst>
-                                    <p:cond delay="1100"/>
+                                    <p:cond delay="1680"/>
                                   </p:stCondLst>
                                   <p:childTnLst>
                                     <p:set>
                                       <p:cBhvr>
-                                        <p:cTn id="36" dur="1" fill="hold">
+                                        <p:cTn id="56" dur="1" fill="hold">
                                           <p:stCondLst>
                                             <p:cond delay="0"/>
                                           </p:stCondLst>
                                         </p:cTn>
                                         <p:tgtEl>
-                                          <p:spTgt spid="12"/>
+                                          <p:spTgt spid="14"/>
                                         </p:tgtEl>
                                         <p:attrNameLst>
                                           <p:attrName>style.visibility</p:attrName>
@@ -37373,30 +37734,121 @@
                                     </p:set>
                                     <p:animEffect transition="in" filter="fade">
                                       <p:cBhvr>
-                                        <p:cTn id="37" dur="400"/>
-                                        <p:tgtEl>
-                                          <p:spTgt spid="12"/>
+                                        <p:cTn id="57" dur="350"/>
+                                        <p:tgtEl>
+                                          <p:spTgt spid="14"/>
                                         </p:tgtEl>
                                       </p:cBhvr>
                                     </p:animEffect>
                                   </p:childTnLst>
                                 </p:cTn>
                               </p:par>
+                            </p:childTnLst>
+                          </p:cTn>
+                        </p:par>
+                        <p:par>
+                          <p:cTn id="58" fill="hold">
+                            <p:stCondLst>
+                              <p:cond delay="15770"/>
+                            </p:stCondLst>
+                            <p:childTnLst>
                               <p:par>
-                                <p:cTn id="38" presetID="10" presetClass="entr" presetSubtype="0" fill="hold" grpId="0" nodeType="withEffect">
+                                <p:cTn id="59" presetID="23" presetClass="entr" presetSubtype="16" fill="hold" nodeType="afterEffect">
                                   <p:stCondLst>
-                                    <p:cond delay="1100"/>
+                                    <p:cond delay="1820"/>
                                   </p:stCondLst>
                                   <p:childTnLst>
                                     <p:set>
                                       <p:cBhvr>
-                                        <p:cTn id="39" dur="1" fill="hold">
+                                        <p:cTn id="60" dur="1" fill="hold">
                                           <p:stCondLst>
                                             <p:cond delay="0"/>
                                           </p:stCondLst>
                                         </p:cTn>
                                         <p:tgtEl>
-                                          <p:spTgt spid="13"/>
+                                          <p:spTgt spid="15"/>
+                                        </p:tgtEl>
+                                        <p:attrNameLst>
+                                          <p:attrName>style.visibility</p:attrName>
+                                        </p:attrNameLst>
+                                      </p:cBhvr>
+                                      <p:to>
+                                        <p:strVal val="visible"/>
+                                      </p:to>
+                                    </p:set>
+                                    <p:anim calcmode="lin" valueType="num">
+                                      <p:cBhvr>
+                                        <p:cTn id="61" dur="500" fill="hold"/>
+                                        <p:tgtEl>
+                                          <p:spTgt spid="15"/>
+                                        </p:tgtEl>
+                                        <p:attrNameLst>
+                                          <p:attrName>ppt_w</p:attrName>
+                                        </p:attrNameLst>
+                                      </p:cBhvr>
+                                      <p:tavLst>
+                                        <p:tav tm="0">
+                                          <p:val>
+                                            <p:fltVal val="0"/>
+                                          </p:val>
+                                        </p:tav>
+                                        <p:tav tm="100000">
+                                          <p:val>
+                                            <p:strVal val="#ppt_w"/>
+                                          </p:val>
+                                        </p:tav>
+                                      </p:tavLst>
+                                    </p:anim>
+                                    <p:anim calcmode="lin" valueType="num">
+                                      <p:cBhvr>
+                                        <p:cTn id="62" dur="500" fill="hold"/>
+                                        <p:tgtEl>
+                                          <p:spTgt spid="15"/>
+                                        </p:tgtEl>
+                                        <p:attrNameLst>
+                                          <p:attrName>ppt_h</p:attrName>
+                                        </p:attrNameLst>
+                                      </p:cBhvr>
+                                      <p:tavLst>
+                                        <p:tav tm="0">
+                                          <p:val>
+                                            <p:fltVal val="0"/>
+                                          </p:val>
+                                        </p:tav>
+                                        <p:tav tm="100000">
+                                          <p:val>
+                                            <p:strVal val="#ppt_h"/>
+                                          </p:val>
+                                        </p:tav>
+                                      </p:tavLst>
+                                    </p:anim>
+                                  </p:childTnLst>
+                                </p:cTn>
+                              </p:par>
+                            </p:childTnLst>
+                          </p:cTn>
+                        </p:par>
+                        <p:par>
+                          <p:cTn id="63" fill="hold">
+                            <p:stCondLst>
+                              <p:cond delay="18090"/>
+                            </p:stCondLst>
+                            <p:childTnLst>
+                              <p:par>
+                                <p:cTn id="64" presetID="10" presetClass="entr" presetSubtype="0" fill="hold" grpId="0" nodeType="afterEffect">
+                                  <p:stCondLst>
+                                    <p:cond delay="1960"/>
+                                  </p:stCondLst>
+                                  <p:childTnLst>
+                                    <p:set>
+                                      <p:cBhvr>
+                                        <p:cTn id="65" dur="1" fill="hold">
+                                          <p:stCondLst>
+                                            <p:cond delay="0"/>
+                                          </p:stCondLst>
+                                        </p:cTn>
+                                        <p:tgtEl>
+                                          <p:spTgt spid="16"/>
                                         </p:tgtEl>
                                         <p:attrNameLst>
                                           <p:attrName>style.visibility</p:attrName>
@@ -37408,9 +37860,9 @@
                                     </p:set>
                                     <p:animEffect transition="in" filter="fade">
                                       <p:cBhvr>
-                                        <p:cTn id="40" dur="400"/>
-                                        <p:tgtEl>
-                                          <p:spTgt spid="13"/>
+                                        <p:cTn id="66" dur="350"/>
+                                        <p:tgtEl>
+                                          <p:spTgt spid="16"/>
                                         </p:tgtEl>
                                       </p:cBhvr>
                                     </p:animEffect>
@@ -37452,9 +37904,11 @@
       <p:bldP spid="6" grpId="0" animBg="1"/>
       <p:bldP spid="8" grpId="0" animBg="1"/>
       <p:bldP spid="9" grpId="0" animBg="1"/>
+      <p:bldP spid="10" grpId="0" animBg="1"/>
       <p:bldP spid="11" grpId="0" animBg="1"/>
-      <p:bldP spid="12" grpId="0" animBg="1"/>
       <p:bldP spid="13" grpId="0" animBg="1"/>
+      <p:bldP spid="14" grpId="0" animBg="1"/>
+      <p:bldP spid="16" grpId="0" animBg="1"/>
     </p:bldLst>
   </p:timing>
 </p:sld>
@@ -38340,13 +38794,13 @@
   <p:clrMapOvr>
     <a:masterClrMapping/>
   </p:clrMapOvr>
-  <mc:AlternateContent xmlns:mc="http://schemas.openxmlformats.org/markup-compatibility/2006">
-    <mc:Choice xmlns:p14="http://schemas.microsoft.com/office/powerpoint/2010/main" Requires="p14">
+  <mc:AlternateContent xmlns:mc="http://schemas.openxmlformats.org/markup-compatibility/2006" xmlns:p14="http://schemas.microsoft.com/office/powerpoint/2010/main">
+    <mc:Choice Requires="p14">
       <p:transition spd="med" p14:dur="700">
         <p:fade thruBlk="1"/>
       </p:transition>
     </mc:Choice>
-    <mc:Fallback>
+    <mc:Fallback xmlns="">
       <p:transition spd="med">
         <p:fade thruBlk="1"/>
       </p:transition>
@@ -39717,13 +40171,13 @@
   <p:clrMapOvr>
     <a:masterClrMapping/>
   </p:clrMapOvr>
-  <mc:AlternateContent xmlns:mc="http://schemas.openxmlformats.org/markup-compatibility/2006">
-    <mc:Choice xmlns:p14="http://schemas.microsoft.com/office/powerpoint/2010/main" Requires="p14">
+  <mc:AlternateContent xmlns:mc="http://schemas.openxmlformats.org/markup-compatibility/2006" xmlns:p14="http://schemas.microsoft.com/office/powerpoint/2010/main">
+    <mc:Choice Requires="p14">
       <p:transition spd="med" p14:dur="700">
         <p:fade thruBlk="1"/>
       </p:transition>
     </mc:Choice>
-    <mc:Fallback>
+    <mc:Fallback xmlns="">
       <p:transition spd="med">
         <p:fade thruBlk="1"/>
       </p:transition>
@@ -42608,13 +43062,13 @@
   <p:clrMapOvr>
     <a:masterClrMapping/>
   </p:clrMapOvr>
-  <mc:AlternateContent xmlns:mc="http://schemas.openxmlformats.org/markup-compatibility/2006">
-    <mc:Choice xmlns:p14="http://schemas.microsoft.com/office/powerpoint/2010/main" Requires="p14">
+  <mc:AlternateContent xmlns:mc="http://schemas.openxmlformats.org/markup-compatibility/2006" xmlns:p14="http://schemas.microsoft.com/office/powerpoint/2010/main">
+    <mc:Choice Requires="p14">
       <p:transition spd="med" p14:dur="700">
         <p:fade thruBlk="1"/>
       </p:transition>
     </mc:Choice>
-    <mc:Fallback>
+    <mc:Fallback xmlns="">
       <p:transition spd="med">
         <p:fade thruBlk="1"/>
       </p:transition>
